--- a/methodology-figure/method.pptx
+++ b/methodology-figure/method.pptx
@@ -243,7 +243,7 @@
           <a:p>
             <a:fld id="{50678969-7B68-F14A-95D0-6E4907897CA7}" type="datetimeFigureOut">
               <a:rPr lang="en-US" smtClean="0"/>
-              <a:t>3/25/24</a:t>
+              <a:t>5/29/2025</a:t>
             </a:fld>
             <a:endParaRPr lang="en-US"/>
           </a:p>
@@ -413,7 +413,7 @@
           <a:p>
             <a:fld id="{50678969-7B68-F14A-95D0-6E4907897CA7}" type="datetimeFigureOut">
               <a:rPr lang="en-US" smtClean="0"/>
-              <a:t>3/25/24</a:t>
+              <a:t>5/29/2025</a:t>
             </a:fld>
             <a:endParaRPr lang="en-US"/>
           </a:p>
@@ -593,7 +593,7 @@
           <a:p>
             <a:fld id="{50678969-7B68-F14A-95D0-6E4907897CA7}" type="datetimeFigureOut">
               <a:rPr lang="en-US" smtClean="0"/>
-              <a:t>3/25/24</a:t>
+              <a:t>5/29/2025</a:t>
             </a:fld>
             <a:endParaRPr lang="en-US"/>
           </a:p>
@@ -763,7 +763,7 @@
           <a:p>
             <a:fld id="{50678969-7B68-F14A-95D0-6E4907897CA7}" type="datetimeFigureOut">
               <a:rPr lang="en-US" smtClean="0"/>
-              <a:t>3/25/24</a:t>
+              <a:t>5/29/2025</a:t>
             </a:fld>
             <a:endParaRPr lang="en-US"/>
           </a:p>
@@ -1009,7 +1009,7 @@
           <a:p>
             <a:fld id="{50678969-7B68-F14A-95D0-6E4907897CA7}" type="datetimeFigureOut">
               <a:rPr lang="en-US" smtClean="0"/>
-              <a:t>3/25/24</a:t>
+              <a:t>5/29/2025</a:t>
             </a:fld>
             <a:endParaRPr lang="en-US"/>
           </a:p>
@@ -1241,7 +1241,7 @@
           <a:p>
             <a:fld id="{50678969-7B68-F14A-95D0-6E4907897CA7}" type="datetimeFigureOut">
               <a:rPr lang="en-US" smtClean="0"/>
-              <a:t>3/25/24</a:t>
+              <a:t>5/29/2025</a:t>
             </a:fld>
             <a:endParaRPr lang="en-US"/>
           </a:p>
@@ -1608,7 +1608,7 @@
           <a:p>
             <a:fld id="{50678969-7B68-F14A-95D0-6E4907897CA7}" type="datetimeFigureOut">
               <a:rPr lang="en-US" smtClean="0"/>
-              <a:t>3/25/24</a:t>
+              <a:t>5/29/2025</a:t>
             </a:fld>
             <a:endParaRPr lang="en-US"/>
           </a:p>
@@ -1726,7 +1726,7 @@
           <a:p>
             <a:fld id="{50678969-7B68-F14A-95D0-6E4907897CA7}" type="datetimeFigureOut">
               <a:rPr lang="en-US" smtClean="0"/>
-              <a:t>3/25/24</a:t>
+              <a:t>5/29/2025</a:t>
             </a:fld>
             <a:endParaRPr lang="en-US"/>
           </a:p>
@@ -1821,7 +1821,7 @@
           <a:p>
             <a:fld id="{50678969-7B68-F14A-95D0-6E4907897CA7}" type="datetimeFigureOut">
               <a:rPr lang="en-US" smtClean="0"/>
-              <a:t>3/25/24</a:t>
+              <a:t>5/29/2025</a:t>
             </a:fld>
             <a:endParaRPr lang="en-US"/>
           </a:p>
@@ -2098,7 +2098,7 @@
           <a:p>
             <a:fld id="{50678969-7B68-F14A-95D0-6E4907897CA7}" type="datetimeFigureOut">
               <a:rPr lang="en-US" smtClean="0"/>
-              <a:t>3/25/24</a:t>
+              <a:t>5/29/2025</a:t>
             </a:fld>
             <a:endParaRPr lang="en-US"/>
           </a:p>
@@ -2355,7 +2355,7 @@
           <a:p>
             <a:fld id="{50678969-7B68-F14A-95D0-6E4907897CA7}" type="datetimeFigureOut">
               <a:rPr lang="en-US" smtClean="0"/>
-              <a:t>3/25/24</a:t>
+              <a:t>5/29/2025</a:t>
             </a:fld>
             <a:endParaRPr lang="en-US"/>
           </a:p>
@@ -2568,7 +2568,7 @@
           <a:p>
             <a:fld id="{50678969-7B68-F14A-95D0-6E4907897CA7}" type="datetimeFigureOut">
               <a:rPr lang="en-US" smtClean="0"/>
-              <a:t>3/25/24</a:t>
+              <a:t>5/29/2025</a:t>
             </a:fld>
             <a:endParaRPr lang="en-US"/>
           </a:p>
@@ -3558,8 +3558,8 @@
         </p:nvSpPr>
         <p:spPr>
           <a:xfrm>
-            <a:off x="853634" y="183187"/>
-            <a:ext cx="606481" cy="246221"/>
+            <a:off x="841385" y="83534"/>
+            <a:ext cx="606481" cy="400110"/>
           </a:xfrm>
           <a:prstGeom prst="rect">
             <a:avLst/>
@@ -3575,12 +3575,23 @@
           </a:bodyPr>
           <a:lstStyle/>
           <a:p>
+            <a:pPr algn="ctr"/>
             <a:r>
               <a:rPr lang="en-US" sz="1000" dirty="0">
                 <a:latin typeface="Times New Roman" panose="02020603050405020304" pitchFamily="18" charset="0"/>
                 <a:cs typeface="Times New Roman" panose="02020603050405020304" pitchFamily="18" charset="0"/>
               </a:rPr>
               <a:t>Collect</a:t>
+            </a:r>
+          </a:p>
+          <a:p>
+            <a:pPr algn="ctr"/>
+            <a:r>
+              <a:rPr lang="en-US" sz="1000" dirty="0">
+                <a:latin typeface="Times New Roman" panose="02020603050405020304" pitchFamily="18" charset="0"/>
+                <a:cs typeface="Times New Roman" panose="02020603050405020304" pitchFamily="18" charset="0"/>
+              </a:rPr>
+              <a:t>Tools</a:t>
             </a:r>
           </a:p>
         </p:txBody>
@@ -3984,7 +3995,7 @@
                 <a:latin typeface="Times New Roman" panose="02020603050405020304" pitchFamily="18" charset="0"/>
                 <a:cs typeface="Times New Roman" panose="02020603050405020304" pitchFamily="18" charset="0"/>
               </a:rPr>
-              <a:t>Extract Forks</a:t>
+              <a:t>Collect Forks</a:t>
             </a:r>
           </a:p>
         </p:txBody>
@@ -4071,7 +4082,7 @@
                 <a:latin typeface="Times New Roman" panose="02020603050405020304" pitchFamily="18" charset="0"/>
                 <a:cs typeface="Times New Roman" panose="02020603050405020304" pitchFamily="18" charset="0"/>
               </a:rPr>
-              <a:t>Extract Issues</a:t>
+              <a:t>Collect Issues</a:t>
             </a:r>
           </a:p>
         </p:txBody>
@@ -4318,7 +4329,7 @@
                 <a:latin typeface="Times New Roman" panose="02020603050405020304" pitchFamily="18" charset="0"/>
                 <a:cs typeface="Times New Roman" panose="02020603050405020304" pitchFamily="18" charset="0"/>
               </a:rPr>
-              <a:t>Search</a:t>
+              <a:t>Collect</a:t>
             </a:r>
           </a:p>
           <a:p>
